--- a/PDF Downloader.pptx
+++ b/PDF Downloader.pptx
@@ -5,18 +5,22 @@
     <p:sldMasterId id="2147483648" r:id="rId4"/>
   </p:sldMasterIdLst>
   <p:notesMasterIdLst>
-    <p:notesMasterId r:id="rId11"/>
+    <p:notesMasterId r:id="rId15"/>
   </p:notesMasterIdLst>
   <p:handoutMasterIdLst>
-    <p:handoutMasterId r:id="rId12"/>
+    <p:handoutMasterId r:id="rId16"/>
   </p:handoutMasterIdLst>
   <p:sldIdLst>
     <p:sldId id="256" r:id="rId5"/>
     <p:sldId id="259" r:id="rId6"/>
     <p:sldId id="257" r:id="rId7"/>
     <p:sldId id="261" r:id="rId8"/>
-    <p:sldId id="258" r:id="rId9"/>
-    <p:sldId id="260" r:id="rId10"/>
+    <p:sldId id="262" r:id="rId9"/>
+    <p:sldId id="258" r:id="rId10"/>
+    <p:sldId id="263" r:id="rId11"/>
+    <p:sldId id="264" r:id="rId12"/>
+    <p:sldId id="265" r:id="rId13"/>
+    <p:sldId id="260" r:id="rId14"/>
   </p:sldIdLst>
   <p:sldSz cx="12192000" cy="6858000"/>
   <p:notesSz cx="6858000" cy="9144000"/>
@@ -25745,6 +25749,118 @@
 </p:sld>
 </file>
 
+<file path=ppt/slides/slide10.xml><?xml version="1.0" encoding="utf-8"?>
+<p:sld xmlns:a="http://schemas.openxmlformats.org/drawingml/2006/main" xmlns:r="http://schemas.openxmlformats.org/officeDocument/2006/relationships" xmlns:p="http://schemas.openxmlformats.org/presentationml/2006/main">
+  <p:cSld>
+    <p:spTree>
+      <p:nvGrpSpPr>
+        <p:cNvPr id="1" name=""/>
+        <p:cNvGrpSpPr/>
+        <p:nvPr/>
+      </p:nvGrpSpPr>
+      <p:grpSpPr>
+        <a:xfrm>
+          <a:off x="0" y="0"/>
+          <a:ext cx="0" cy="0"/>
+          <a:chOff x="0" y="0"/>
+          <a:chExt cx="0" cy="0"/>
+        </a:xfrm>
+      </p:grpSpPr>
+      <p:sp>
+        <p:nvSpPr>
+          <p:cNvPr id="2" name="Title 1">
+            <a:extLst>
+              <a:ext uri="{FF2B5EF4-FFF2-40B4-BE49-F238E27FC236}">
+                <a16:creationId xmlns:a16="http://schemas.microsoft.com/office/drawing/2014/main" id="{7BB46F19-C645-B802-DAFE-2FB426B48E8B}"/>
+              </a:ext>
+            </a:extLst>
+          </p:cNvPr>
+          <p:cNvSpPr>
+            <a:spLocks noGrp="1"/>
+          </p:cNvSpPr>
+          <p:nvPr>
+            <p:ph type="title"/>
+          </p:nvPr>
+        </p:nvSpPr>
+        <p:spPr/>
+        <p:txBody>
+          <a:bodyPr>
+            <a:normAutofit/>
+          </a:bodyPr>
+          <a:lstStyle/>
+          <a:p>
+            <a:pPr algn="ctr"/>
+            <a:r>
+              <a:rPr lang="da-DK" noProof="0" dirty="0" err="1"/>
+              <a:t>Arrange</a:t>
+            </a:r>
+            <a:br>
+              <a:rPr lang="da-DK" noProof="0" dirty="0"/>
+            </a:br>
+            <a:br>
+              <a:rPr lang="da-DK" noProof="0" dirty="0"/>
+            </a:br>
+            <a:r>
+              <a:rPr lang="da-DK" noProof="0" dirty="0" err="1"/>
+              <a:t>Act</a:t>
+            </a:r>
+            <a:br>
+              <a:rPr lang="da-DK" noProof="0" dirty="0"/>
+            </a:br>
+            <a:br>
+              <a:rPr lang="da-DK" noProof="0" dirty="0"/>
+            </a:br>
+            <a:r>
+              <a:rPr lang="da-DK" noProof="0" dirty="0" err="1"/>
+              <a:t>Assert</a:t>
+            </a:r>
+            <a:endParaRPr lang="da-DK" noProof="0" dirty="0"/>
+          </a:p>
+        </p:txBody>
+      </p:sp>
+      <p:sp>
+        <p:nvSpPr>
+          <p:cNvPr id="3" name="Slide Number Placeholder 2">
+            <a:extLst>
+              <a:ext uri="{FF2B5EF4-FFF2-40B4-BE49-F238E27FC236}">
+                <a16:creationId xmlns:a16="http://schemas.microsoft.com/office/drawing/2014/main" id="{6E13637B-0F5C-F38A-752E-2E1D496FD47B}"/>
+              </a:ext>
+            </a:extLst>
+          </p:cNvPr>
+          <p:cNvSpPr>
+            <a:spLocks noGrp="1"/>
+          </p:cNvSpPr>
+          <p:nvPr>
+            <p:ph type="sldNum" sz="quarter" idx="12"/>
+          </p:nvPr>
+        </p:nvSpPr>
+        <p:spPr/>
+        <p:txBody>
+          <a:bodyPr/>
+          <a:lstStyle/>
+          <a:p>
+            <a:fld id="{C263D6C4-4840-40CC-AC84-17E24B3B7BDE}" type="slidenum">
+              <a:rPr lang="da-DK" noProof="0" smtClean="0"/>
+              <a:pPr/>
+              <a:t>10</a:t>
+            </a:fld>
+            <a:endParaRPr lang="da-DK" noProof="0" dirty="0"/>
+          </a:p>
+        </p:txBody>
+      </p:sp>
+    </p:spTree>
+    <p:extLst>
+      <p:ext uri="{BB962C8B-B14F-4D97-AF65-F5344CB8AC3E}">
+        <p14:creationId xmlns:p14="http://schemas.microsoft.com/office/powerpoint/2010/main" val="341466172"/>
+      </p:ext>
+    </p:extLst>
+  </p:cSld>
+  <p:clrMapOvr>
+    <a:masterClrMapping/>
+  </p:clrMapOvr>
+</p:sld>
+</file>
+
 <file path=ppt/slides/slide2.xml><?xml version="1.0" encoding="utf-8"?>
 <p:sld xmlns:a="http://schemas.openxmlformats.org/drawingml/2006/main" xmlns:r="http://schemas.openxmlformats.org/officeDocument/2006/relationships" xmlns:p="http://schemas.openxmlformats.org/presentationml/2006/main">
   <p:cSld>
@@ -25863,21 +25979,22 @@
           <a:p>
             <a:pPr lvl="2"/>
             <a:r>
-              <a:rPr lang="da-DK" dirty="0"/>
+              <a:rPr lang="da-DK" noProof="0" dirty="0"/>
               <a:t>GUI</a:t>
             </a:r>
           </a:p>
           <a:p>
             <a:pPr lvl="2"/>
             <a:r>
-              <a:rPr lang="da-DK" noProof="0" dirty="0"/>
+              <a:rPr lang="da-DK" noProof="0" dirty="0" err="1"/>
               <a:t>Pickel</a:t>
             </a:r>
+            <a:endParaRPr lang="da-DK" noProof="0" dirty="0"/>
           </a:p>
           <a:p>
             <a:r>
               <a:rPr lang="da-DK" noProof="0" dirty="0"/>
-              <a:t>Testing</a:t>
+              <a:t>Testning</a:t>
             </a:r>
           </a:p>
           <a:p>
@@ -25891,14 +26008,21 @@
             <a:pPr lvl="1"/>
             <a:r>
               <a:rPr lang="da-DK" noProof="0" dirty="0"/>
-              <a:t>Unit test</a:t>
+              <a:t>Hvordan forbereder vi det bedst?</a:t>
             </a:r>
           </a:p>
           <a:p>
             <a:pPr lvl="1"/>
             <a:r>
               <a:rPr lang="da-DK" noProof="0" dirty="0"/>
-              <a:t>Intergrations test</a:t>
+              <a:t>Tests</a:t>
+            </a:r>
+          </a:p>
+          <a:p>
+            <a:pPr lvl="1"/>
+            <a:r>
+              <a:rPr lang="da-DK" noProof="0" dirty="0"/>
+              <a:t>Hvad jeg har gjort</a:t>
             </a:r>
           </a:p>
         </p:txBody>
@@ -26068,7 +26192,7 @@
           <a:lstStyle/>
           <a:p>
             <a:r>
-              <a:rPr lang="da-DK" dirty="0"/>
+              <a:rPr lang="da-DK" noProof="0" dirty="0"/>
               <a:t>Opgaven</a:t>
             </a:r>
           </a:p>
@@ -26096,11 +26220,11 @@
           <a:lstStyle/>
           <a:p>
             <a:fld id="{C263D6C4-4840-40CC-AC84-17E24B3B7BDE}" type="slidenum">
-              <a:rPr lang="en-US" noProof="0" smtClean="0"/>
+              <a:rPr lang="da-DK" noProof="0" smtClean="0"/>
               <a:pPr/>
               <a:t>4</a:t>
             </a:fld>
-            <a:endParaRPr lang="en-US" noProof="0" dirty="0"/>
+            <a:endParaRPr lang="da-DK" noProof="0" dirty="0"/>
           </a:p>
         </p:txBody>
       </p:sp>
@@ -26125,7 +26249,22 @@
           <a:bodyPr/>
           <a:lstStyle/>
           <a:p>
-            <a:endParaRPr lang="da-DK"/>
+            <a:r>
+              <a:rPr lang="da-DK" noProof="0" dirty="0"/>
+              <a:t>Skal kunne downloade Pdf's</a:t>
+            </a:r>
+          </a:p>
+          <a:p>
+            <a:r>
+              <a:rPr lang="da-DK" noProof="0" dirty="0"/>
+              <a:t>Tage Links fra Excel</a:t>
+            </a:r>
+          </a:p>
+          <a:p>
+            <a:r>
+              <a:rPr lang="da-DK" noProof="0" dirty="0"/>
+              <a:t>Opdatere et andet Excel med status</a:t>
+            </a:r>
           </a:p>
         </p:txBody>
       </p:sp>
@@ -26143,6 +26282,565 @@
 </file>
 
 <file path=ppt/slides/slide5.xml><?xml version="1.0" encoding="utf-8"?>
+<p:sld xmlns:a="http://schemas.openxmlformats.org/drawingml/2006/main" xmlns:r="http://schemas.openxmlformats.org/officeDocument/2006/relationships" xmlns:p="http://schemas.openxmlformats.org/presentationml/2006/main">
+  <p:cSld>
+    <p:spTree>
+      <p:nvGrpSpPr>
+        <p:cNvPr id="1" name=""/>
+        <p:cNvGrpSpPr/>
+        <p:nvPr/>
+      </p:nvGrpSpPr>
+      <p:grpSpPr>
+        <a:xfrm>
+          <a:off x="0" y="0"/>
+          <a:ext cx="0" cy="0"/>
+          <a:chOff x="0" y="0"/>
+          <a:chExt cx="0" cy="0"/>
+        </a:xfrm>
+      </p:grpSpPr>
+      <p:sp>
+        <p:nvSpPr>
+          <p:cNvPr id="2" name="Title 1">
+            <a:extLst>
+              <a:ext uri="{FF2B5EF4-FFF2-40B4-BE49-F238E27FC236}">
+                <a16:creationId xmlns:a16="http://schemas.microsoft.com/office/drawing/2014/main" id="{E3E3F6F2-D2B6-A7ED-FEF4-3EAA5FC3B21B}"/>
+              </a:ext>
+            </a:extLst>
+          </p:cNvPr>
+          <p:cNvSpPr>
+            <a:spLocks noGrp="1"/>
+          </p:cNvSpPr>
+          <p:nvPr>
+            <p:ph type="title"/>
+          </p:nvPr>
+        </p:nvSpPr>
+        <p:spPr>
+          <a:xfrm>
+            <a:off x="444500" y="542925"/>
+            <a:ext cx="1893258" cy="535531"/>
+          </a:xfrm>
+        </p:spPr>
+        <p:txBody>
+          <a:bodyPr/>
+          <a:lstStyle/>
+          <a:p>
+            <a:r>
+              <a:rPr lang="da-DK" noProof="0" dirty="0"/>
+              <a:t>Mit fokus</a:t>
+            </a:r>
+          </a:p>
+        </p:txBody>
+      </p:sp>
+      <p:sp>
+        <p:nvSpPr>
+          <p:cNvPr id="3" name="Slide Number Placeholder 2">
+            <a:extLst>
+              <a:ext uri="{FF2B5EF4-FFF2-40B4-BE49-F238E27FC236}">
+                <a16:creationId xmlns:a16="http://schemas.microsoft.com/office/drawing/2014/main" id="{DD7A5F65-E37C-BA06-48C6-FFE1489AA266}"/>
+              </a:ext>
+            </a:extLst>
+          </p:cNvPr>
+          <p:cNvSpPr>
+            <a:spLocks noGrp="1"/>
+          </p:cNvSpPr>
+          <p:nvPr>
+            <p:ph type="sldNum" sz="quarter" idx="12"/>
+          </p:nvPr>
+        </p:nvSpPr>
+        <p:spPr/>
+        <p:txBody>
+          <a:bodyPr/>
+          <a:lstStyle/>
+          <a:p>
+            <a:fld id="{C263D6C4-4840-40CC-AC84-17E24B3B7BDE}" type="slidenum">
+              <a:rPr lang="da-DK" noProof="0" smtClean="0"/>
+              <a:pPr/>
+              <a:t>5</a:t>
+            </a:fld>
+            <a:endParaRPr lang="da-DK" noProof="0" dirty="0"/>
+          </a:p>
+        </p:txBody>
+      </p:sp>
+      <p:sp>
+        <p:nvSpPr>
+          <p:cNvPr id="4" name="Text Placeholder 3">
+            <a:extLst>
+              <a:ext uri="{FF2B5EF4-FFF2-40B4-BE49-F238E27FC236}">
+                <a16:creationId xmlns:a16="http://schemas.microsoft.com/office/drawing/2014/main" id="{BC285A6F-E84B-668B-AD73-0FE2254D4269}"/>
+              </a:ext>
+            </a:extLst>
+          </p:cNvPr>
+          <p:cNvSpPr>
+            <a:spLocks noGrp="1"/>
+          </p:cNvSpPr>
+          <p:nvPr>
+            <p:ph type="body" sz="quarter" idx="13"/>
+          </p:nvPr>
+        </p:nvSpPr>
+        <p:spPr/>
+        <p:txBody>
+          <a:bodyPr/>
+          <a:lstStyle/>
+          <a:p>
+            <a:r>
+              <a:rPr lang="da-DK" noProof="0" dirty="0" err="1"/>
+              <a:t>Tkinter</a:t>
+            </a:r>
+            <a:endParaRPr lang="da-DK" noProof="0" dirty="0"/>
+          </a:p>
+          <a:p>
+            <a:endParaRPr lang="da-DK" noProof="0" dirty="0"/>
+          </a:p>
+          <a:p>
+            <a:r>
+              <a:rPr lang="da-DK" sz="2000" i="1" noProof="0" dirty="0"/>
+              <a:t>“Hvad nu hvis noget ændre sig?”</a:t>
+            </a:r>
+          </a:p>
+          <a:p>
+            <a:endParaRPr lang="da-DK" sz="2000" i="1" noProof="0" dirty="0"/>
+          </a:p>
+          <a:p>
+            <a:r>
+              <a:rPr lang="da-DK" noProof="0" dirty="0" err="1"/>
+              <a:t>Pickel</a:t>
+            </a:r>
+            <a:endParaRPr lang="da-DK" noProof="0" dirty="0"/>
+          </a:p>
+        </p:txBody>
+      </p:sp>
+      <p:sp>
+        <p:nvSpPr>
+          <p:cNvPr id="5" name="Title 1">
+            <a:extLst>
+              <a:ext uri="{FF2B5EF4-FFF2-40B4-BE49-F238E27FC236}">
+                <a16:creationId xmlns:a16="http://schemas.microsoft.com/office/drawing/2014/main" id="{CA4933A5-6874-E5DA-4EF8-B8E76B05C06C}"/>
+              </a:ext>
+            </a:extLst>
+          </p:cNvPr>
+          <p:cNvSpPr txBox="1">
+            <a:spLocks/>
+          </p:cNvSpPr>
+          <p:nvPr/>
+        </p:nvSpPr>
+        <p:spPr>
+          <a:xfrm>
+            <a:off x="2337758" y="542925"/>
+            <a:ext cx="3623095" cy="535531"/>
+          </a:xfrm>
+          <a:prstGeom prst="rect">
+            <a:avLst/>
+          </a:prstGeom>
+        </p:spPr>
+        <p:txBody>
+          <a:bodyPr vert="horz" wrap="square" lIns="91440" tIns="45720" rIns="91440" bIns="45720" rtlCol="0" anchor="t">
+            <a:spAutoFit/>
+          </a:bodyPr>
+          <a:lstStyle>
+            <a:lvl1pPr algn="l" defTabSz="914400" rtl="0" eaLnBrk="1" latinLnBrk="0" hangingPunct="1">
+              <a:lnSpc>
+                <a:spcPct val="90000"/>
+              </a:lnSpc>
+              <a:spcBef>
+                <a:spcPct val="0"/>
+              </a:spcBef>
+              <a:buNone/>
+              <a:defRPr lang="en-GB" sz="3200" b="1" kern="1200" spc="-70" baseline="0" dirty="0">
+                <a:solidFill>
+                  <a:schemeClr val="bg1"/>
+                </a:solidFill>
+                <a:latin typeface="+mj-lt"/>
+                <a:ea typeface="+mj-ea"/>
+                <a:cs typeface="+mj-cs"/>
+              </a:defRPr>
+            </a:lvl1pPr>
+          </a:lstStyle>
+          <a:p>
+            <a:r>
+              <a:rPr lang="da-DK" noProof="0" dirty="0"/>
+              <a:t>- Brugervenlighed</a:t>
+            </a:r>
+          </a:p>
+        </p:txBody>
+      </p:sp>
+      <p:pic>
+        <p:nvPicPr>
+          <p:cNvPr id="8" name="Picture 7">
+            <a:extLst>
+              <a:ext uri="{FF2B5EF4-FFF2-40B4-BE49-F238E27FC236}">
+                <a16:creationId xmlns:a16="http://schemas.microsoft.com/office/drawing/2014/main" id="{F48B4105-5A9E-8EC9-4BD7-B255B77058A0}"/>
+              </a:ext>
+            </a:extLst>
+          </p:cNvPr>
+          <p:cNvPicPr>
+            <a:picLocks noChangeAspect="1"/>
+          </p:cNvPicPr>
+          <p:nvPr/>
+        </p:nvPicPr>
+        <p:blipFill>
+          <a:blip r:embed="rId2"/>
+          <a:stretch>
+            <a:fillRect/>
+          </a:stretch>
+        </p:blipFill>
+        <p:spPr>
+          <a:xfrm>
+            <a:off x="409575" y="2884905"/>
+            <a:ext cx="6313513" cy="3612732"/>
+          </a:xfrm>
+          <a:prstGeom prst="rect">
+            <a:avLst/>
+          </a:prstGeom>
+        </p:spPr>
+      </p:pic>
+    </p:spTree>
+    <p:extLst>
+      <p:ext uri="{BB962C8B-B14F-4D97-AF65-F5344CB8AC3E}">
+        <p14:creationId xmlns:p14="http://schemas.microsoft.com/office/powerpoint/2010/main" val="2137834228"/>
+      </p:ext>
+    </p:extLst>
+  </p:cSld>
+  <p:clrMapOvr>
+    <a:masterClrMapping/>
+  </p:clrMapOvr>
+  <p:timing>
+    <p:tnLst>
+      <p:par>
+        <p:cTn id="1" dur="indefinite" restart="never" nodeType="tmRoot">
+          <p:childTnLst>
+            <p:seq concurrent="1" nextAc="seek">
+              <p:cTn id="2" dur="indefinite" nodeType="mainSeq">
+                <p:childTnLst>
+                  <p:par>
+                    <p:cTn id="3" fill="hold">
+                      <p:stCondLst>
+                        <p:cond delay="indefinite"/>
+                      </p:stCondLst>
+                      <p:childTnLst>
+                        <p:par>
+                          <p:cTn id="4" fill="hold">
+                            <p:stCondLst>
+                              <p:cond delay="0"/>
+                            </p:stCondLst>
+                            <p:childTnLst>
+                              <p:par>
+                                <p:cTn id="5" presetID="1" presetClass="entr" presetSubtype="0" fill="hold" grpId="0" nodeType="clickEffect">
+                                  <p:stCondLst>
+                                    <p:cond delay="0"/>
+                                  </p:stCondLst>
+                                  <p:childTnLst>
+                                    <p:set>
+                                      <p:cBhvr>
+                                        <p:cTn id="6" dur="1" fill="hold">
+                                          <p:stCondLst>
+                                            <p:cond delay="0"/>
+                                          </p:stCondLst>
+                                        </p:cTn>
+                                        <p:tgtEl>
+                                          <p:spTgt spid="5"/>
+                                        </p:tgtEl>
+                                        <p:attrNameLst>
+                                          <p:attrName>style.visibility</p:attrName>
+                                        </p:attrNameLst>
+                                      </p:cBhvr>
+                                      <p:to>
+                                        <p:strVal val="visible"/>
+                                      </p:to>
+                                    </p:set>
+                                  </p:childTnLst>
+                                </p:cTn>
+                              </p:par>
+                            </p:childTnLst>
+                          </p:cTn>
+                        </p:par>
+                      </p:childTnLst>
+                    </p:cTn>
+                  </p:par>
+                  <p:par>
+                    <p:cTn id="7" fill="hold">
+                      <p:stCondLst>
+                        <p:cond delay="indefinite"/>
+                      </p:stCondLst>
+                      <p:childTnLst>
+                        <p:par>
+                          <p:cTn id="8" fill="hold">
+                            <p:stCondLst>
+                              <p:cond delay="0"/>
+                            </p:stCondLst>
+                            <p:childTnLst>
+                              <p:par>
+                                <p:cTn id="9" presetID="10" presetClass="entr" presetSubtype="0" fill="hold" grpId="0" nodeType="clickEffect">
+                                  <p:stCondLst>
+                                    <p:cond delay="0"/>
+                                  </p:stCondLst>
+                                  <p:childTnLst>
+                                    <p:set>
+                                      <p:cBhvr>
+                                        <p:cTn id="10" dur="1" fill="hold">
+                                          <p:stCondLst>
+                                            <p:cond delay="0"/>
+                                          </p:stCondLst>
+                                        </p:cTn>
+                                        <p:tgtEl>
+                                          <p:spTgt spid="4">
+                                            <p:txEl>
+                                              <p:pRg st="0" end="0"/>
+                                            </p:txEl>
+                                          </p:spTgt>
+                                        </p:tgtEl>
+                                        <p:attrNameLst>
+                                          <p:attrName>style.visibility</p:attrName>
+                                        </p:attrNameLst>
+                                      </p:cBhvr>
+                                      <p:to>
+                                        <p:strVal val="visible"/>
+                                      </p:to>
+                                    </p:set>
+                                    <p:animEffect transition="in" filter="fade">
+                                      <p:cBhvr>
+                                        <p:cTn id="11" dur="500"/>
+                                        <p:tgtEl>
+                                          <p:spTgt spid="4">
+                                            <p:txEl>
+                                              <p:pRg st="0" end="0"/>
+                                            </p:txEl>
+                                          </p:spTgt>
+                                        </p:tgtEl>
+                                      </p:cBhvr>
+                                    </p:animEffect>
+                                  </p:childTnLst>
+                                </p:cTn>
+                              </p:par>
+                            </p:childTnLst>
+                          </p:cTn>
+                        </p:par>
+                      </p:childTnLst>
+                    </p:cTn>
+                  </p:par>
+                  <p:par>
+                    <p:cTn id="12" fill="hold">
+                      <p:stCondLst>
+                        <p:cond delay="indefinite"/>
+                      </p:stCondLst>
+                      <p:childTnLst>
+                        <p:par>
+                          <p:cTn id="13" fill="hold">
+                            <p:stCondLst>
+                              <p:cond delay="0"/>
+                            </p:stCondLst>
+                            <p:childTnLst>
+                              <p:par>
+                                <p:cTn id="14" presetID="10" presetClass="entr" presetSubtype="0" fill="hold" grpId="0" nodeType="clickEffect">
+                                  <p:stCondLst>
+                                    <p:cond delay="0"/>
+                                  </p:stCondLst>
+                                  <p:childTnLst>
+                                    <p:set>
+                                      <p:cBhvr>
+                                        <p:cTn id="15" dur="1" fill="hold">
+                                          <p:stCondLst>
+                                            <p:cond delay="0"/>
+                                          </p:stCondLst>
+                                        </p:cTn>
+                                        <p:tgtEl>
+                                          <p:spTgt spid="4">
+                                            <p:txEl>
+                                              <p:pRg st="2" end="2"/>
+                                            </p:txEl>
+                                          </p:spTgt>
+                                        </p:tgtEl>
+                                        <p:attrNameLst>
+                                          <p:attrName>style.visibility</p:attrName>
+                                        </p:attrNameLst>
+                                      </p:cBhvr>
+                                      <p:to>
+                                        <p:strVal val="visible"/>
+                                      </p:to>
+                                    </p:set>
+                                    <p:animEffect transition="in" filter="fade">
+                                      <p:cBhvr>
+                                        <p:cTn id="16" dur="500"/>
+                                        <p:tgtEl>
+                                          <p:spTgt spid="4">
+                                            <p:txEl>
+                                              <p:pRg st="2" end="2"/>
+                                            </p:txEl>
+                                          </p:spTgt>
+                                        </p:tgtEl>
+                                      </p:cBhvr>
+                                    </p:animEffect>
+                                  </p:childTnLst>
+                                </p:cTn>
+                              </p:par>
+                            </p:childTnLst>
+                          </p:cTn>
+                        </p:par>
+                      </p:childTnLst>
+                    </p:cTn>
+                  </p:par>
+                  <p:par>
+                    <p:cTn id="17" fill="hold">
+                      <p:stCondLst>
+                        <p:cond delay="indefinite"/>
+                      </p:stCondLst>
+                      <p:childTnLst>
+                        <p:par>
+                          <p:cTn id="18" fill="hold">
+                            <p:stCondLst>
+                              <p:cond delay="0"/>
+                            </p:stCondLst>
+                            <p:childTnLst>
+                              <p:par>
+                                <p:cTn id="19" presetID="1" presetClass="entr" presetSubtype="0" fill="hold" nodeType="clickEffect">
+                                  <p:stCondLst>
+                                    <p:cond delay="0"/>
+                                  </p:stCondLst>
+                                  <p:childTnLst>
+                                    <p:set>
+                                      <p:cBhvr>
+                                        <p:cTn id="20" dur="1" fill="hold">
+                                          <p:stCondLst>
+                                            <p:cond delay="0"/>
+                                          </p:stCondLst>
+                                        </p:cTn>
+                                        <p:tgtEl>
+                                          <p:spTgt spid="8"/>
+                                        </p:tgtEl>
+                                        <p:attrNameLst>
+                                          <p:attrName>style.visibility</p:attrName>
+                                        </p:attrNameLst>
+                                      </p:cBhvr>
+                                      <p:to>
+                                        <p:strVal val="visible"/>
+                                      </p:to>
+                                    </p:set>
+                                  </p:childTnLst>
+                                </p:cTn>
+                              </p:par>
+                              <p:par>
+                                <p:cTn id="21" presetID="10" presetClass="entr" presetSubtype="0" fill="hold" grpId="0" nodeType="withEffect">
+                                  <p:stCondLst>
+                                    <p:cond delay="0"/>
+                                  </p:stCondLst>
+                                  <p:childTnLst>
+                                    <p:set>
+                                      <p:cBhvr>
+                                        <p:cTn id="22" dur="1" fill="hold">
+                                          <p:stCondLst>
+                                            <p:cond delay="0"/>
+                                          </p:stCondLst>
+                                        </p:cTn>
+                                        <p:tgtEl>
+                                          <p:spTgt spid="4">
+                                            <p:txEl>
+                                              <p:pRg st="4" end="4"/>
+                                            </p:txEl>
+                                          </p:spTgt>
+                                        </p:tgtEl>
+                                        <p:attrNameLst>
+                                          <p:attrName>style.visibility</p:attrName>
+                                        </p:attrNameLst>
+                                      </p:cBhvr>
+                                      <p:to>
+                                        <p:strVal val="visible"/>
+                                      </p:to>
+                                    </p:set>
+                                    <p:animEffect transition="in" filter="fade">
+                                      <p:cBhvr>
+                                        <p:cTn id="23" dur="500"/>
+                                        <p:tgtEl>
+                                          <p:spTgt spid="4">
+                                            <p:txEl>
+                                              <p:pRg st="4" end="4"/>
+                                            </p:txEl>
+                                          </p:spTgt>
+                                        </p:tgtEl>
+                                      </p:cBhvr>
+                                    </p:animEffect>
+                                  </p:childTnLst>
+                                </p:cTn>
+                              </p:par>
+                            </p:childTnLst>
+                          </p:cTn>
+                        </p:par>
+                      </p:childTnLst>
+                    </p:cTn>
+                  </p:par>
+                  <p:par>
+                    <p:cTn id="24" fill="hold">
+                      <p:stCondLst>
+                        <p:cond delay="indefinite"/>
+                      </p:stCondLst>
+                      <p:childTnLst>
+                        <p:par>
+                          <p:cTn id="25" fill="hold">
+                            <p:stCondLst>
+                              <p:cond delay="0"/>
+                            </p:stCondLst>
+                            <p:childTnLst>
+                              <p:par>
+                                <p:cTn id="26" presetID="1" presetClass="exit" presetSubtype="0" fill="hold" nodeType="clickEffect">
+                                  <p:stCondLst>
+                                    <p:cond delay="0"/>
+                                  </p:stCondLst>
+                                  <p:childTnLst>
+                                    <p:set>
+                                      <p:cBhvr>
+                                        <p:cTn id="27" dur="1" fill="hold">
+                                          <p:stCondLst>
+                                            <p:cond delay="0"/>
+                                          </p:stCondLst>
+                                        </p:cTn>
+                                        <p:tgtEl>
+                                          <p:spTgt spid="8"/>
+                                        </p:tgtEl>
+                                        <p:attrNameLst>
+                                          <p:attrName>style.visibility</p:attrName>
+                                        </p:attrNameLst>
+                                      </p:cBhvr>
+                                      <p:to>
+                                        <p:strVal val="hidden"/>
+                                      </p:to>
+                                    </p:set>
+                                  </p:childTnLst>
+                                </p:cTn>
+                              </p:par>
+                            </p:childTnLst>
+                          </p:cTn>
+                        </p:par>
+                      </p:childTnLst>
+                    </p:cTn>
+                  </p:par>
+                </p:childTnLst>
+              </p:cTn>
+              <p:prevCondLst>
+                <p:cond evt="onPrev" delay="0">
+                  <p:tgtEl>
+                    <p:sldTgt/>
+                  </p:tgtEl>
+                </p:cond>
+              </p:prevCondLst>
+              <p:nextCondLst>
+                <p:cond evt="onNext" delay="0">
+                  <p:tgtEl>
+                    <p:sldTgt/>
+                  </p:tgtEl>
+                </p:cond>
+              </p:nextCondLst>
+            </p:seq>
+          </p:childTnLst>
+        </p:cTn>
+      </p:par>
+    </p:tnLst>
+    <p:bldLst>
+      <p:bldP spid="4" grpId="0" uiExpand="1" build="p"/>
+      <p:bldP spid="5" grpId="0"/>
+    </p:bldLst>
+  </p:timing>
+</p:sld>
+</file>
+
+<file path=ppt/slides/slide6.xml><?xml version="1.0" encoding="utf-8"?>
 <p:sld xmlns:a="http://schemas.openxmlformats.org/drawingml/2006/main" xmlns:r="http://schemas.openxmlformats.org/officeDocument/2006/relationships" xmlns:p="http://schemas.openxmlformats.org/presentationml/2006/main">
   <p:cSld>
     <p:spTree>
@@ -26208,7 +26906,7 @@
             <a:fld id="{C263D6C4-4840-40CC-AC84-17E24B3B7BDE}" type="slidenum">
               <a:rPr lang="da-DK" noProof="0" smtClean="0"/>
               <a:pPr/>
-              <a:t>5</a:t>
+              <a:t>6</a:t>
             </a:fld>
             <a:endParaRPr lang="da-DK" noProof="0" dirty="0"/>
           </a:p>
@@ -26235,7 +26933,10 @@
           <a:bodyPr/>
           <a:lstStyle/>
           <a:p>
-            <a:endParaRPr lang="da-DK" noProof="0" dirty="0"/>
+            <a:r>
+              <a:rPr lang="da-DK" noProof="0" dirty="0"/>
+              <a:t>Testning</a:t>
+            </a:r>
           </a:p>
         </p:txBody>
       </p:sp>
@@ -26252,7 +26953,7 @@
 </p:sld>
 </file>
 
-<file path=ppt/slides/slide6.xml><?xml version="1.0" encoding="utf-8"?>
+<file path=ppt/slides/slide7.xml><?xml version="1.0" encoding="utf-8"?>
 <p:sld xmlns:a="http://schemas.openxmlformats.org/drawingml/2006/main" xmlns:r="http://schemas.openxmlformats.org/officeDocument/2006/relationships" xmlns:p="http://schemas.openxmlformats.org/presentationml/2006/main">
   <p:cSld>
     <p:spTree>
@@ -26274,7 +26975,7 @@
           <p:cNvPr id="2" name="Title 1">
             <a:extLst>
               <a:ext uri="{FF2B5EF4-FFF2-40B4-BE49-F238E27FC236}">
-                <a16:creationId xmlns:a16="http://schemas.microsoft.com/office/drawing/2014/main" id="{7BB46F19-C645-B802-DAFE-2FB426B48E8B}"/>
+                <a16:creationId xmlns:a16="http://schemas.microsoft.com/office/drawing/2014/main" id="{74874644-FC40-A9FD-CDC3-85366B6B4BCB}"/>
               </a:ext>
             </a:extLst>
           </p:cNvPr>
@@ -26287,35 +26988,12 @@
         </p:nvSpPr>
         <p:spPr/>
         <p:txBody>
-          <a:bodyPr>
-            <a:normAutofit/>
-          </a:bodyPr>
+          <a:bodyPr/>
           <a:lstStyle/>
           <a:p>
-            <a:pPr algn="ctr"/>
             <a:r>
               <a:rPr lang="da-DK" noProof="0" dirty="0"/>
-              <a:t>Arrange</a:t>
-            </a:r>
-            <a:br>
-              <a:rPr lang="da-DK" noProof="0" dirty="0"/>
-            </a:br>
-            <a:br>
-              <a:rPr lang="da-DK" noProof="0" dirty="0"/>
-            </a:br>
-            <a:r>
-              <a:rPr lang="da-DK" noProof="0" dirty="0"/>
-              <a:t>Act</a:t>
-            </a:r>
-            <a:br>
-              <a:rPr lang="da-DK" noProof="0" dirty="0"/>
-            </a:br>
-            <a:br>
-              <a:rPr lang="da-DK" noProof="0" dirty="0"/>
-            </a:br>
-            <a:r>
-              <a:rPr lang="da-DK" noProof="0" dirty="0"/>
-              <a:t>Assert</a:t>
+              <a:t>Hvorfor?</a:t>
             </a:r>
           </a:p>
         </p:txBody>
@@ -26325,7 +27003,7 @@
           <p:cNvPr id="3" name="Slide Number Placeholder 2">
             <a:extLst>
               <a:ext uri="{FF2B5EF4-FFF2-40B4-BE49-F238E27FC236}">
-                <a16:creationId xmlns:a16="http://schemas.microsoft.com/office/drawing/2014/main" id="{6E13637B-0F5C-F38A-752E-2E1D496FD47B}"/>
+                <a16:creationId xmlns:a16="http://schemas.microsoft.com/office/drawing/2014/main" id="{756E1D61-A35F-AC37-C2F8-FFF7348D63AD}"/>
               </a:ext>
             </a:extLst>
           </p:cNvPr>
@@ -26344,8 +27022,725 @@
             <a:fld id="{C263D6C4-4840-40CC-AC84-17E24B3B7BDE}" type="slidenum">
               <a:rPr lang="da-DK" noProof="0" smtClean="0"/>
               <a:pPr/>
-              <a:t>6</a:t>
+              <a:t>7</a:t>
             </a:fld>
+            <a:endParaRPr lang="da-DK" noProof="0" dirty="0"/>
+          </a:p>
+        </p:txBody>
+      </p:sp>
+      <p:sp>
+        <p:nvSpPr>
+          <p:cNvPr id="4" name="Text Placeholder 3">
+            <a:extLst>
+              <a:ext uri="{FF2B5EF4-FFF2-40B4-BE49-F238E27FC236}">
+                <a16:creationId xmlns:a16="http://schemas.microsoft.com/office/drawing/2014/main" id="{C137AA60-2220-E730-6DC5-891BF701BF96}"/>
+              </a:ext>
+            </a:extLst>
+          </p:cNvPr>
+          <p:cNvSpPr>
+            <a:spLocks noGrp="1"/>
+          </p:cNvSpPr>
+          <p:nvPr>
+            <p:ph type="body" sz="quarter" idx="13"/>
+          </p:nvPr>
+        </p:nvSpPr>
+        <p:spPr>
+          <a:xfrm>
+            <a:off x="444500" y="1625385"/>
+            <a:ext cx="6718300" cy="535531"/>
+          </a:xfrm>
+        </p:spPr>
+        <p:txBody>
+          <a:bodyPr/>
+          <a:lstStyle/>
+          <a:p>
+            <a:r>
+              <a:rPr lang="da-DK" sz="2400" i="1" noProof="0" dirty="0"/>
+              <a:t>“Hvorfor er det så vigtigt?”</a:t>
+            </a:r>
+          </a:p>
+        </p:txBody>
+      </p:sp>
+      <p:sp>
+        <p:nvSpPr>
+          <p:cNvPr id="5" name="Text Placeholder 3">
+            <a:extLst>
+              <a:ext uri="{FF2B5EF4-FFF2-40B4-BE49-F238E27FC236}">
+                <a16:creationId xmlns:a16="http://schemas.microsoft.com/office/drawing/2014/main" id="{3CC1E8C0-48A3-045C-257D-24F27826EE86}"/>
+              </a:ext>
+            </a:extLst>
+          </p:cNvPr>
+          <p:cNvSpPr txBox="1">
+            <a:spLocks/>
+          </p:cNvSpPr>
+          <p:nvPr/>
+        </p:nvSpPr>
+        <p:spPr>
+          <a:xfrm>
+            <a:off x="444500" y="2160916"/>
+            <a:ext cx="6718300" cy="4014912"/>
+          </a:xfrm>
+          <a:prstGeom prst="rect">
+            <a:avLst/>
+          </a:prstGeom>
+        </p:spPr>
+        <p:txBody>
+          <a:bodyPr vert="horz" lIns="91440" tIns="45720" rIns="91440" bIns="45720" rtlCol="0">
+            <a:noAutofit/>
+          </a:bodyPr>
+          <a:lstStyle>
+            <a:lvl1pPr marL="228600" indent="-228600" algn="l" defTabSz="914400" rtl="0" eaLnBrk="1" latinLnBrk="0" hangingPunct="1">
+              <a:lnSpc>
+                <a:spcPct val="100000"/>
+              </a:lnSpc>
+              <a:spcBef>
+                <a:spcPts val="600"/>
+              </a:spcBef>
+              <a:spcAft>
+                <a:spcPts val="400"/>
+              </a:spcAft>
+              <a:buClr>
+                <a:schemeClr val="accent2"/>
+              </a:buClr>
+              <a:buFont typeface="Arial" panose="020B0604020202020204" pitchFamily="34" charset="0"/>
+              <a:buChar char="•"/>
+              <a:defRPr sz="1600" kern="1200">
+                <a:solidFill>
+                  <a:schemeClr val="bg1"/>
+                </a:solidFill>
+                <a:latin typeface="+mn-lt"/>
+                <a:ea typeface="+mn-ea"/>
+                <a:cs typeface="Arial" panose="020B0604020202020204" pitchFamily="34" charset="0"/>
+              </a:defRPr>
+            </a:lvl1pPr>
+            <a:lvl2pPr marL="685800" indent="-228600" algn="l" defTabSz="914400" rtl="0" eaLnBrk="1" latinLnBrk="0" hangingPunct="1">
+              <a:lnSpc>
+                <a:spcPct val="100000"/>
+              </a:lnSpc>
+              <a:spcBef>
+                <a:spcPts val="600"/>
+              </a:spcBef>
+              <a:spcAft>
+                <a:spcPts val="400"/>
+              </a:spcAft>
+              <a:buClr>
+                <a:schemeClr val="accent2"/>
+              </a:buClr>
+              <a:buFont typeface="Arial" panose="020B0604020202020204" pitchFamily="34" charset="0"/>
+              <a:buChar char="•"/>
+              <a:defRPr sz="1400" kern="1200">
+                <a:solidFill>
+                  <a:schemeClr val="bg1"/>
+                </a:solidFill>
+                <a:latin typeface="+mn-lt"/>
+                <a:ea typeface="+mn-ea"/>
+                <a:cs typeface="Arial" panose="020B0604020202020204" pitchFamily="34" charset="0"/>
+              </a:defRPr>
+            </a:lvl2pPr>
+            <a:lvl3pPr marL="1143000" indent="-228600" algn="l" defTabSz="914400" rtl="0" eaLnBrk="1" latinLnBrk="0" hangingPunct="1">
+              <a:lnSpc>
+                <a:spcPct val="100000"/>
+              </a:lnSpc>
+              <a:spcBef>
+                <a:spcPts val="600"/>
+              </a:spcBef>
+              <a:spcAft>
+                <a:spcPts val="400"/>
+              </a:spcAft>
+              <a:buClr>
+                <a:schemeClr val="accent2"/>
+              </a:buClr>
+              <a:buFont typeface="Arial" panose="020B0604020202020204" pitchFamily="34" charset="0"/>
+              <a:buChar char="•"/>
+              <a:defRPr sz="1200" kern="1200">
+                <a:solidFill>
+                  <a:schemeClr val="bg1"/>
+                </a:solidFill>
+                <a:latin typeface="+mn-lt"/>
+                <a:ea typeface="+mn-ea"/>
+                <a:cs typeface="Arial" panose="020B0604020202020204" pitchFamily="34" charset="0"/>
+              </a:defRPr>
+            </a:lvl3pPr>
+            <a:lvl4pPr marL="1600200" indent="-228600" algn="l" defTabSz="914400" rtl="0" eaLnBrk="1" latinLnBrk="0" hangingPunct="1">
+              <a:lnSpc>
+                <a:spcPct val="90000"/>
+              </a:lnSpc>
+              <a:spcBef>
+                <a:spcPts val="500"/>
+              </a:spcBef>
+              <a:buClr>
+                <a:schemeClr val="accent2"/>
+              </a:buClr>
+              <a:buFont typeface="Arial" panose="020B0604020202020204" pitchFamily="34" charset="0"/>
+              <a:buChar char="•"/>
+              <a:defRPr sz="1400" kern="1200">
+                <a:solidFill>
+                  <a:schemeClr val="bg1"/>
+                </a:solidFill>
+                <a:latin typeface="Arial" panose="020B0604020202020204" pitchFamily="34" charset="0"/>
+                <a:ea typeface="+mn-ea"/>
+                <a:cs typeface="Arial" panose="020B0604020202020204" pitchFamily="34" charset="0"/>
+              </a:defRPr>
+            </a:lvl4pPr>
+            <a:lvl5pPr marL="2057400" indent="-228600" algn="l" defTabSz="914400" rtl="0" eaLnBrk="1" latinLnBrk="0" hangingPunct="1">
+              <a:lnSpc>
+                <a:spcPct val="90000"/>
+              </a:lnSpc>
+              <a:spcBef>
+                <a:spcPts val="500"/>
+              </a:spcBef>
+              <a:buClr>
+                <a:schemeClr val="accent2"/>
+              </a:buClr>
+              <a:buFont typeface="Arial" panose="020B0604020202020204" pitchFamily="34" charset="0"/>
+              <a:buChar char="•"/>
+              <a:defRPr sz="1400" kern="1200">
+                <a:solidFill>
+                  <a:schemeClr val="bg1"/>
+                </a:solidFill>
+                <a:latin typeface="Arial" panose="020B0604020202020204" pitchFamily="34" charset="0"/>
+                <a:ea typeface="+mn-ea"/>
+                <a:cs typeface="Arial" panose="020B0604020202020204" pitchFamily="34" charset="0"/>
+              </a:defRPr>
+            </a:lvl5pPr>
+            <a:lvl6pPr marL="2514600" indent="-228600" algn="l" defTabSz="914400" rtl="0" eaLnBrk="1" latinLnBrk="0" hangingPunct="1">
+              <a:lnSpc>
+                <a:spcPct val="90000"/>
+              </a:lnSpc>
+              <a:spcBef>
+                <a:spcPts val="500"/>
+              </a:spcBef>
+              <a:buFont typeface="Arial" panose="020B0604020202020204" pitchFamily="34" charset="0"/>
+              <a:buChar char="•"/>
+              <a:defRPr sz="1800" kern="1200">
+                <a:solidFill>
+                  <a:schemeClr val="tx1"/>
+                </a:solidFill>
+                <a:latin typeface="+mn-lt"/>
+                <a:ea typeface="+mn-ea"/>
+                <a:cs typeface="+mn-cs"/>
+              </a:defRPr>
+            </a:lvl6pPr>
+            <a:lvl7pPr marL="2971800" indent="-228600" algn="l" defTabSz="914400" rtl="0" eaLnBrk="1" latinLnBrk="0" hangingPunct="1">
+              <a:lnSpc>
+                <a:spcPct val="90000"/>
+              </a:lnSpc>
+              <a:spcBef>
+                <a:spcPts val="500"/>
+              </a:spcBef>
+              <a:buFont typeface="Arial" panose="020B0604020202020204" pitchFamily="34" charset="0"/>
+              <a:buChar char="•"/>
+              <a:defRPr sz="1800" kern="1200">
+                <a:solidFill>
+                  <a:schemeClr val="tx1"/>
+                </a:solidFill>
+                <a:latin typeface="+mn-lt"/>
+                <a:ea typeface="+mn-ea"/>
+                <a:cs typeface="+mn-cs"/>
+              </a:defRPr>
+            </a:lvl7pPr>
+            <a:lvl8pPr marL="3429000" indent="-228600" algn="l" defTabSz="914400" rtl="0" eaLnBrk="1" latinLnBrk="0" hangingPunct="1">
+              <a:lnSpc>
+                <a:spcPct val="90000"/>
+              </a:lnSpc>
+              <a:spcBef>
+                <a:spcPts val="500"/>
+              </a:spcBef>
+              <a:buFont typeface="Arial" panose="020B0604020202020204" pitchFamily="34" charset="0"/>
+              <a:buChar char="•"/>
+              <a:defRPr sz="1800" kern="1200">
+                <a:solidFill>
+                  <a:schemeClr val="tx1"/>
+                </a:solidFill>
+                <a:latin typeface="+mn-lt"/>
+                <a:ea typeface="+mn-ea"/>
+                <a:cs typeface="+mn-cs"/>
+              </a:defRPr>
+            </a:lvl8pPr>
+            <a:lvl9pPr marL="3886200" indent="-228600" algn="l" defTabSz="914400" rtl="0" eaLnBrk="1" latinLnBrk="0" hangingPunct="1">
+              <a:lnSpc>
+                <a:spcPct val="90000"/>
+              </a:lnSpc>
+              <a:spcBef>
+                <a:spcPts val="500"/>
+              </a:spcBef>
+              <a:buFont typeface="Arial" panose="020B0604020202020204" pitchFamily="34" charset="0"/>
+              <a:buChar char="•"/>
+              <a:defRPr sz="1800" kern="1200">
+                <a:solidFill>
+                  <a:schemeClr val="tx1"/>
+                </a:solidFill>
+                <a:latin typeface="+mn-lt"/>
+                <a:ea typeface="+mn-ea"/>
+                <a:cs typeface="+mn-cs"/>
+              </a:defRPr>
+            </a:lvl9pPr>
+          </a:lstStyle>
+          <a:p>
+            <a:r>
+              <a:rPr lang="da-DK" noProof="0" dirty="0"/>
+              <a:t>For ikke at skulle køre hvert scenarie</a:t>
+            </a:r>
+          </a:p>
+          <a:p>
+            <a:r>
+              <a:rPr lang="da-DK" noProof="0" dirty="0"/>
+              <a:t>For at sikre at koden virker, selv efter ændringer</a:t>
+            </a:r>
+          </a:p>
+          <a:p>
+            <a:pPr lvl="1"/>
+            <a:r>
+              <a:rPr lang="da-DK" noProof="0" dirty="0"/>
+              <a:t>IC/DC </a:t>
+            </a:r>
+          </a:p>
+        </p:txBody>
+      </p:sp>
+    </p:spTree>
+    <p:extLst>
+      <p:ext uri="{BB962C8B-B14F-4D97-AF65-F5344CB8AC3E}">
+        <p14:creationId xmlns:p14="http://schemas.microsoft.com/office/powerpoint/2010/main" val="1879123752"/>
+      </p:ext>
+    </p:extLst>
+  </p:cSld>
+  <p:clrMapOvr>
+    <a:masterClrMapping/>
+  </p:clrMapOvr>
+  <p:timing>
+    <p:tnLst>
+      <p:par>
+        <p:cTn id="1" dur="indefinite" restart="never" nodeType="tmRoot">
+          <p:childTnLst>
+            <p:seq concurrent="1" nextAc="seek">
+              <p:cTn id="2" dur="indefinite" nodeType="mainSeq">
+                <p:childTnLst>
+                  <p:par>
+                    <p:cTn id="3" fill="hold">
+                      <p:stCondLst>
+                        <p:cond delay="indefinite"/>
+                        <p:cond evt="onBegin" delay="0">
+                          <p:tn val="2"/>
+                        </p:cond>
+                      </p:stCondLst>
+                      <p:childTnLst>
+                        <p:par>
+                          <p:cTn id="4" fill="hold">
+                            <p:stCondLst>
+                              <p:cond delay="0"/>
+                            </p:stCondLst>
+                            <p:childTnLst>
+                              <p:par>
+                                <p:cTn id="5" presetID="10" presetClass="entr" presetSubtype="0" fill="hold" grpId="0" nodeType="afterEffect">
+                                  <p:stCondLst>
+                                    <p:cond delay="2000"/>
+                                  </p:stCondLst>
+                                  <p:childTnLst>
+                                    <p:set>
+                                      <p:cBhvr>
+                                        <p:cTn id="6" dur="1" fill="hold">
+                                          <p:stCondLst>
+                                            <p:cond delay="0"/>
+                                          </p:stCondLst>
+                                        </p:cTn>
+                                        <p:tgtEl>
+                                          <p:spTgt spid="4">
+                                            <p:txEl>
+                                              <p:pRg st="0" end="0"/>
+                                            </p:txEl>
+                                          </p:spTgt>
+                                        </p:tgtEl>
+                                        <p:attrNameLst>
+                                          <p:attrName>style.visibility</p:attrName>
+                                        </p:attrNameLst>
+                                      </p:cBhvr>
+                                      <p:to>
+                                        <p:strVal val="visible"/>
+                                      </p:to>
+                                    </p:set>
+                                    <p:animEffect transition="in" filter="fade">
+                                      <p:cBhvr>
+                                        <p:cTn id="7" dur="1000"/>
+                                        <p:tgtEl>
+                                          <p:spTgt spid="4">
+                                            <p:txEl>
+                                              <p:pRg st="0" end="0"/>
+                                            </p:txEl>
+                                          </p:spTgt>
+                                        </p:tgtEl>
+                                      </p:cBhvr>
+                                    </p:animEffect>
+                                  </p:childTnLst>
+                                </p:cTn>
+                              </p:par>
+                            </p:childTnLst>
+                          </p:cTn>
+                        </p:par>
+                      </p:childTnLst>
+                    </p:cTn>
+                  </p:par>
+                  <p:par>
+                    <p:cTn id="8" fill="hold">
+                      <p:stCondLst>
+                        <p:cond delay="indefinite"/>
+                      </p:stCondLst>
+                      <p:childTnLst>
+                        <p:par>
+                          <p:cTn id="9" fill="hold">
+                            <p:stCondLst>
+                              <p:cond delay="0"/>
+                            </p:stCondLst>
+                            <p:childTnLst>
+                              <p:par>
+                                <p:cTn id="10" presetID="1" presetClass="entr" presetSubtype="0" fill="hold" grpId="0" nodeType="clickEffect">
+                                  <p:stCondLst>
+                                    <p:cond delay="0"/>
+                                  </p:stCondLst>
+                                  <p:childTnLst>
+                                    <p:set>
+                                      <p:cBhvr>
+                                        <p:cTn id="11" dur="1" fill="hold">
+                                          <p:stCondLst>
+                                            <p:cond delay="0"/>
+                                          </p:stCondLst>
+                                        </p:cTn>
+                                        <p:tgtEl>
+                                          <p:spTgt spid="5">
+                                            <p:txEl>
+                                              <p:pRg st="0" end="0"/>
+                                            </p:txEl>
+                                          </p:spTgt>
+                                        </p:tgtEl>
+                                        <p:attrNameLst>
+                                          <p:attrName>style.visibility</p:attrName>
+                                        </p:attrNameLst>
+                                      </p:cBhvr>
+                                      <p:to>
+                                        <p:strVal val="visible"/>
+                                      </p:to>
+                                    </p:set>
+                                  </p:childTnLst>
+                                </p:cTn>
+                              </p:par>
+                              <p:par>
+                                <p:cTn id="12" presetID="1" presetClass="entr" presetSubtype="0" fill="hold" grpId="0" nodeType="withEffect">
+                                  <p:stCondLst>
+                                    <p:cond delay="0"/>
+                                  </p:stCondLst>
+                                  <p:childTnLst>
+                                    <p:set>
+                                      <p:cBhvr>
+                                        <p:cTn id="13" dur="1" fill="hold">
+                                          <p:stCondLst>
+                                            <p:cond delay="0"/>
+                                          </p:stCondLst>
+                                        </p:cTn>
+                                        <p:tgtEl>
+                                          <p:spTgt spid="5">
+                                            <p:txEl>
+                                              <p:pRg st="1" end="1"/>
+                                            </p:txEl>
+                                          </p:spTgt>
+                                        </p:tgtEl>
+                                        <p:attrNameLst>
+                                          <p:attrName>style.visibility</p:attrName>
+                                        </p:attrNameLst>
+                                      </p:cBhvr>
+                                      <p:to>
+                                        <p:strVal val="visible"/>
+                                      </p:to>
+                                    </p:set>
+                                  </p:childTnLst>
+                                </p:cTn>
+                              </p:par>
+                              <p:par>
+                                <p:cTn id="14" presetID="1" presetClass="entr" presetSubtype="0" fill="hold" grpId="0" nodeType="withEffect">
+                                  <p:stCondLst>
+                                    <p:cond delay="0"/>
+                                  </p:stCondLst>
+                                  <p:childTnLst>
+                                    <p:set>
+                                      <p:cBhvr>
+                                        <p:cTn id="15" dur="1" fill="hold">
+                                          <p:stCondLst>
+                                            <p:cond delay="0"/>
+                                          </p:stCondLst>
+                                        </p:cTn>
+                                        <p:tgtEl>
+                                          <p:spTgt spid="5">
+                                            <p:txEl>
+                                              <p:pRg st="2" end="2"/>
+                                            </p:txEl>
+                                          </p:spTgt>
+                                        </p:tgtEl>
+                                        <p:attrNameLst>
+                                          <p:attrName>style.visibility</p:attrName>
+                                        </p:attrNameLst>
+                                      </p:cBhvr>
+                                      <p:to>
+                                        <p:strVal val="visible"/>
+                                      </p:to>
+                                    </p:set>
+                                  </p:childTnLst>
+                                </p:cTn>
+                              </p:par>
+                            </p:childTnLst>
+                          </p:cTn>
+                        </p:par>
+                      </p:childTnLst>
+                    </p:cTn>
+                  </p:par>
+                </p:childTnLst>
+              </p:cTn>
+              <p:prevCondLst>
+                <p:cond evt="onPrev" delay="0">
+                  <p:tgtEl>
+                    <p:sldTgt/>
+                  </p:tgtEl>
+                </p:cond>
+              </p:prevCondLst>
+              <p:nextCondLst>
+                <p:cond evt="onNext" delay="0">
+                  <p:tgtEl>
+                    <p:sldTgt/>
+                  </p:tgtEl>
+                </p:cond>
+              </p:nextCondLst>
+            </p:seq>
+          </p:childTnLst>
+        </p:cTn>
+      </p:par>
+    </p:tnLst>
+    <p:bldLst>
+      <p:bldP spid="4" grpId="0" build="p"/>
+      <p:bldP spid="5" grpId="0" uiExpand="1" build="allAtOnce"/>
+    </p:bldLst>
+  </p:timing>
+</p:sld>
+</file>
+
+<file path=ppt/slides/slide8.xml><?xml version="1.0" encoding="utf-8"?>
+<p:sld xmlns:a="http://schemas.openxmlformats.org/drawingml/2006/main" xmlns:r="http://schemas.openxmlformats.org/officeDocument/2006/relationships" xmlns:p="http://schemas.openxmlformats.org/presentationml/2006/main">
+  <p:cSld>
+    <p:spTree>
+      <p:nvGrpSpPr>
+        <p:cNvPr id="1" name=""/>
+        <p:cNvGrpSpPr/>
+        <p:nvPr/>
+      </p:nvGrpSpPr>
+      <p:grpSpPr>
+        <a:xfrm>
+          <a:off x="0" y="0"/>
+          <a:ext cx="0" cy="0"/>
+          <a:chOff x="0" y="0"/>
+          <a:chExt cx="0" cy="0"/>
+        </a:xfrm>
+      </p:grpSpPr>
+      <p:sp>
+        <p:nvSpPr>
+          <p:cNvPr id="2" name="Title 1">
+            <a:extLst>
+              <a:ext uri="{FF2B5EF4-FFF2-40B4-BE49-F238E27FC236}">
+                <a16:creationId xmlns:a16="http://schemas.microsoft.com/office/drawing/2014/main" id="{6BA9EAE4-842D-8279-3FE6-78A423012090}"/>
+              </a:ext>
+            </a:extLst>
+          </p:cNvPr>
+          <p:cNvSpPr>
+            <a:spLocks noGrp="1"/>
+          </p:cNvSpPr>
+          <p:nvPr>
+            <p:ph type="title"/>
+          </p:nvPr>
+        </p:nvSpPr>
+        <p:spPr/>
+        <p:txBody>
+          <a:bodyPr/>
+          <a:lstStyle/>
+          <a:p>
+            <a:r>
+              <a:rPr lang="da-DK" noProof="0" dirty="0"/>
+              <a:t>Hvordan forbereder vi bedst?</a:t>
+            </a:r>
+          </a:p>
+        </p:txBody>
+      </p:sp>
+      <p:sp>
+        <p:nvSpPr>
+          <p:cNvPr id="3" name="Slide Number Placeholder 2">
+            <a:extLst>
+              <a:ext uri="{FF2B5EF4-FFF2-40B4-BE49-F238E27FC236}">
+                <a16:creationId xmlns:a16="http://schemas.microsoft.com/office/drawing/2014/main" id="{1A1ED648-1A54-3F23-9F7F-E745CFEE65AB}"/>
+              </a:ext>
+            </a:extLst>
+          </p:cNvPr>
+          <p:cNvSpPr>
+            <a:spLocks noGrp="1"/>
+          </p:cNvSpPr>
+          <p:nvPr>
+            <p:ph type="sldNum" sz="quarter" idx="12"/>
+          </p:nvPr>
+        </p:nvSpPr>
+        <p:spPr/>
+        <p:txBody>
+          <a:bodyPr/>
+          <a:lstStyle/>
+          <a:p>
+            <a:fld id="{C263D6C4-4840-40CC-AC84-17E24B3B7BDE}" type="slidenum">
+              <a:rPr lang="da-DK" noProof="0" smtClean="0"/>
+              <a:pPr/>
+              <a:t>8</a:t>
+            </a:fld>
+            <a:endParaRPr lang="da-DK" noProof="0" dirty="0"/>
+          </a:p>
+        </p:txBody>
+      </p:sp>
+      <p:sp>
+        <p:nvSpPr>
+          <p:cNvPr id="4" name="Text Placeholder 3">
+            <a:extLst>
+              <a:ext uri="{FF2B5EF4-FFF2-40B4-BE49-F238E27FC236}">
+                <a16:creationId xmlns:a16="http://schemas.microsoft.com/office/drawing/2014/main" id="{BF663EAA-858D-CBDC-A9AE-105CDC9BFC58}"/>
+              </a:ext>
+            </a:extLst>
+          </p:cNvPr>
+          <p:cNvSpPr>
+            <a:spLocks noGrp="1"/>
+          </p:cNvSpPr>
+          <p:nvPr>
+            <p:ph type="body" sz="quarter" idx="13"/>
+          </p:nvPr>
+        </p:nvSpPr>
+        <p:spPr/>
+        <p:txBody>
+          <a:bodyPr/>
+          <a:lstStyle/>
+          <a:p>
+            <a:pPr marL="0" indent="0">
+              <a:buNone/>
+            </a:pPr>
+            <a:r>
+              <a:rPr lang="da-DK" noProof="0" dirty="0"/>
+              <a:t>Vores kode:</a:t>
+            </a:r>
+          </a:p>
+          <a:p>
+            <a:r>
+              <a:rPr lang="da-DK" noProof="0" dirty="0"/>
+              <a:t>Clean Code</a:t>
+            </a:r>
+          </a:p>
+          <a:p>
+            <a:r>
+              <a:rPr lang="da-DK" noProof="0" dirty="0"/>
+              <a:t>Fokuserede Metoder</a:t>
+            </a:r>
+          </a:p>
+          <a:p>
+            <a:endParaRPr lang="da-DK" noProof="0" dirty="0"/>
+          </a:p>
+          <a:p>
+            <a:pPr marL="0" indent="0">
+              <a:buNone/>
+            </a:pPr>
+            <a:r>
+              <a:rPr lang="da-DK" noProof="0" dirty="0"/>
+              <a:t>Testning</a:t>
+            </a:r>
+          </a:p>
+          <a:p>
+            <a:r>
+              <a:rPr lang="da-DK" noProof="0" dirty="0"/>
+              <a:t>Test </a:t>
+            </a:r>
+            <a:r>
+              <a:rPr lang="da-DK" noProof="0" dirty="0" err="1"/>
+              <a:t>environment</a:t>
+            </a:r>
+            <a:endParaRPr lang="da-DK" noProof="0" dirty="0"/>
+          </a:p>
+          <a:p>
+            <a:endParaRPr lang="da-DK" noProof="0" dirty="0"/>
+          </a:p>
+        </p:txBody>
+      </p:sp>
+      <p:pic>
+        <p:nvPicPr>
+          <p:cNvPr id="6" name="Picture 5">
+            <a:extLst>
+              <a:ext uri="{FF2B5EF4-FFF2-40B4-BE49-F238E27FC236}">
+                <a16:creationId xmlns:a16="http://schemas.microsoft.com/office/drawing/2014/main" id="{DB3D8414-7CD4-03B6-123D-C1ABF9B9C94B}"/>
+              </a:ext>
+            </a:extLst>
+          </p:cNvPr>
+          <p:cNvPicPr>
+            <a:picLocks noChangeAspect="1"/>
+          </p:cNvPicPr>
+          <p:nvPr/>
+        </p:nvPicPr>
+        <p:blipFill>
+          <a:blip r:embed="rId2"/>
+          <a:stretch>
+            <a:fillRect/>
+          </a:stretch>
+        </p:blipFill>
+        <p:spPr>
+          <a:xfrm>
+            <a:off x="3454354" y="1881022"/>
+            <a:ext cx="4108496" cy="4616615"/>
+          </a:xfrm>
+          <a:prstGeom prst="rect">
+            <a:avLst/>
+          </a:prstGeom>
+        </p:spPr>
+      </p:pic>
+      <p:sp>
+        <p:nvSpPr>
+          <p:cNvPr id="7" name="Rectangle 6">
+            <a:extLst>
+              <a:ext uri="{FF2B5EF4-FFF2-40B4-BE49-F238E27FC236}">
+                <a16:creationId xmlns:a16="http://schemas.microsoft.com/office/drawing/2014/main" id="{B11F9705-C839-FCE2-8261-4A72214321A7}"/>
+              </a:ext>
+            </a:extLst>
+          </p:cNvPr>
+          <p:cNvSpPr/>
+          <p:nvPr/>
+        </p:nvSpPr>
+        <p:spPr>
+          <a:xfrm>
+            <a:off x="3429000" y="2038350"/>
+            <a:ext cx="4133850" cy="2314575"/>
+          </a:xfrm>
+          <a:prstGeom prst="rect">
+            <a:avLst/>
+          </a:prstGeom>
+          <a:noFill/>
+          <a:ln w="57150">
+            <a:solidFill>
+              <a:srgbClr val="C00000"/>
+            </a:solidFill>
+          </a:ln>
+        </p:spPr>
+        <p:style>
+          <a:lnRef idx="2">
+            <a:schemeClr val="accent1">
+              <a:shade val="15000"/>
+            </a:schemeClr>
+          </a:lnRef>
+          <a:fillRef idx="1">
+            <a:schemeClr val="accent1"/>
+          </a:fillRef>
+          <a:effectRef idx="0">
+            <a:schemeClr val="accent1"/>
+          </a:effectRef>
+          <a:fontRef idx="minor">
+            <a:schemeClr val="lt1"/>
+          </a:fontRef>
+        </p:style>
+        <p:txBody>
+          <a:bodyPr rtlCol="0" anchor="ctr"/>
+          <a:lstStyle/>
+          <a:p>
+            <a:pPr algn="ctr"/>
             <a:endParaRPr lang="da-DK" noProof="0" dirty="0"/>
           </a:p>
         </p:txBody>
@@ -26353,13 +27748,678 @@
     </p:spTree>
     <p:extLst>
       <p:ext uri="{BB962C8B-B14F-4D97-AF65-F5344CB8AC3E}">
-        <p14:creationId xmlns:p14="http://schemas.microsoft.com/office/powerpoint/2010/main" val="341466172"/>
+        <p14:creationId xmlns:p14="http://schemas.microsoft.com/office/powerpoint/2010/main" val="1077611807"/>
       </p:ext>
     </p:extLst>
   </p:cSld>
   <p:clrMapOvr>
     <a:masterClrMapping/>
   </p:clrMapOvr>
+  <p:timing>
+    <p:tnLst>
+      <p:par>
+        <p:cTn id="1" dur="indefinite" restart="never" nodeType="tmRoot">
+          <p:childTnLst>
+            <p:seq concurrent="1" nextAc="seek">
+              <p:cTn id="2" dur="indefinite" nodeType="mainSeq">
+                <p:childTnLst>
+                  <p:par>
+                    <p:cTn id="3" fill="hold">
+                      <p:stCondLst>
+                        <p:cond delay="indefinite"/>
+                      </p:stCondLst>
+                      <p:childTnLst>
+                        <p:par>
+                          <p:cTn id="4" fill="hold">
+                            <p:stCondLst>
+                              <p:cond delay="0"/>
+                            </p:stCondLst>
+                            <p:childTnLst>
+                              <p:par>
+                                <p:cTn id="5" presetID="1" presetClass="entr" presetSubtype="0" fill="hold" nodeType="clickEffect">
+                                  <p:stCondLst>
+                                    <p:cond delay="0"/>
+                                  </p:stCondLst>
+                                  <p:childTnLst>
+                                    <p:set>
+                                      <p:cBhvr>
+                                        <p:cTn id="6" dur="1" fill="hold">
+                                          <p:stCondLst>
+                                            <p:cond delay="0"/>
+                                          </p:stCondLst>
+                                        </p:cTn>
+                                        <p:tgtEl>
+                                          <p:spTgt spid="4">
+                                            <p:txEl>
+                                              <p:pRg st="0" end="0"/>
+                                            </p:txEl>
+                                          </p:spTgt>
+                                        </p:tgtEl>
+                                        <p:attrNameLst>
+                                          <p:attrName>style.visibility</p:attrName>
+                                        </p:attrNameLst>
+                                      </p:cBhvr>
+                                      <p:to>
+                                        <p:strVal val="visible"/>
+                                      </p:to>
+                                    </p:set>
+                                  </p:childTnLst>
+                                </p:cTn>
+                              </p:par>
+                            </p:childTnLst>
+                          </p:cTn>
+                        </p:par>
+                        <p:par>
+                          <p:cTn id="7" fill="hold">
+                            <p:stCondLst>
+                              <p:cond delay="0"/>
+                            </p:stCondLst>
+                            <p:childTnLst>
+                              <p:par>
+                                <p:cTn id="8" presetID="1" presetClass="entr" presetSubtype="0" fill="hold" nodeType="afterEffect">
+                                  <p:stCondLst>
+                                    <p:cond delay="1000"/>
+                                  </p:stCondLst>
+                                  <p:childTnLst>
+                                    <p:set>
+                                      <p:cBhvr>
+                                        <p:cTn id="9" dur="1" fill="hold">
+                                          <p:stCondLst>
+                                            <p:cond delay="0"/>
+                                          </p:stCondLst>
+                                        </p:cTn>
+                                        <p:tgtEl>
+                                          <p:spTgt spid="4">
+                                            <p:txEl>
+                                              <p:pRg st="1" end="1"/>
+                                            </p:txEl>
+                                          </p:spTgt>
+                                        </p:tgtEl>
+                                        <p:attrNameLst>
+                                          <p:attrName>style.visibility</p:attrName>
+                                        </p:attrNameLst>
+                                      </p:cBhvr>
+                                      <p:to>
+                                        <p:strVal val="visible"/>
+                                      </p:to>
+                                    </p:set>
+                                  </p:childTnLst>
+                                </p:cTn>
+                              </p:par>
+                            </p:childTnLst>
+                          </p:cTn>
+                        </p:par>
+                        <p:par>
+                          <p:cTn id="10" fill="hold">
+                            <p:stCondLst>
+                              <p:cond delay="1000"/>
+                            </p:stCondLst>
+                            <p:childTnLst>
+                              <p:par>
+                                <p:cTn id="11" presetID="1" presetClass="entr" presetSubtype="0" fill="hold" nodeType="afterEffect">
+                                  <p:stCondLst>
+                                    <p:cond delay="0"/>
+                                  </p:stCondLst>
+                                  <p:childTnLst>
+                                    <p:set>
+                                      <p:cBhvr>
+                                        <p:cTn id="12" dur="1" fill="hold">
+                                          <p:stCondLst>
+                                            <p:cond delay="0"/>
+                                          </p:stCondLst>
+                                        </p:cTn>
+                                        <p:tgtEl>
+                                          <p:spTgt spid="4">
+                                            <p:txEl>
+                                              <p:pRg st="2" end="2"/>
+                                            </p:txEl>
+                                          </p:spTgt>
+                                        </p:tgtEl>
+                                        <p:attrNameLst>
+                                          <p:attrName>style.visibility</p:attrName>
+                                        </p:attrNameLst>
+                                      </p:cBhvr>
+                                      <p:to>
+                                        <p:strVal val="visible"/>
+                                      </p:to>
+                                    </p:set>
+                                  </p:childTnLst>
+                                </p:cTn>
+                              </p:par>
+                            </p:childTnLst>
+                          </p:cTn>
+                        </p:par>
+                      </p:childTnLst>
+                    </p:cTn>
+                  </p:par>
+                  <p:par>
+                    <p:cTn id="13" fill="hold">
+                      <p:stCondLst>
+                        <p:cond delay="indefinite"/>
+                      </p:stCondLst>
+                      <p:childTnLst>
+                        <p:par>
+                          <p:cTn id="14" fill="hold">
+                            <p:stCondLst>
+                              <p:cond delay="0"/>
+                            </p:stCondLst>
+                            <p:childTnLst>
+                              <p:par>
+                                <p:cTn id="15" presetID="1" presetClass="entr" presetSubtype="0" fill="hold" nodeType="clickEffect">
+                                  <p:stCondLst>
+                                    <p:cond delay="0"/>
+                                  </p:stCondLst>
+                                  <p:childTnLst>
+                                    <p:set>
+                                      <p:cBhvr>
+                                        <p:cTn id="16" dur="1" fill="hold">
+                                          <p:stCondLst>
+                                            <p:cond delay="0"/>
+                                          </p:stCondLst>
+                                        </p:cTn>
+                                        <p:tgtEl>
+                                          <p:spTgt spid="4">
+                                            <p:txEl>
+                                              <p:pRg st="4" end="4"/>
+                                            </p:txEl>
+                                          </p:spTgt>
+                                        </p:tgtEl>
+                                        <p:attrNameLst>
+                                          <p:attrName>style.visibility</p:attrName>
+                                        </p:attrNameLst>
+                                      </p:cBhvr>
+                                      <p:to>
+                                        <p:strVal val="visible"/>
+                                      </p:to>
+                                    </p:set>
+                                  </p:childTnLst>
+                                </p:cTn>
+                              </p:par>
+                            </p:childTnLst>
+                          </p:cTn>
+                        </p:par>
+                        <p:par>
+                          <p:cTn id="17" fill="hold">
+                            <p:stCondLst>
+                              <p:cond delay="0"/>
+                            </p:stCondLst>
+                            <p:childTnLst>
+                              <p:par>
+                                <p:cTn id="18" presetID="1" presetClass="entr" presetSubtype="0" fill="hold" nodeType="afterEffect">
+                                  <p:stCondLst>
+                                    <p:cond delay="500"/>
+                                  </p:stCondLst>
+                                  <p:childTnLst>
+                                    <p:set>
+                                      <p:cBhvr>
+                                        <p:cTn id="19" dur="1" fill="hold">
+                                          <p:stCondLst>
+                                            <p:cond delay="0"/>
+                                          </p:stCondLst>
+                                        </p:cTn>
+                                        <p:tgtEl>
+                                          <p:spTgt spid="4">
+                                            <p:txEl>
+                                              <p:pRg st="5" end="5"/>
+                                            </p:txEl>
+                                          </p:spTgt>
+                                        </p:tgtEl>
+                                        <p:attrNameLst>
+                                          <p:attrName>style.visibility</p:attrName>
+                                        </p:attrNameLst>
+                                      </p:cBhvr>
+                                      <p:to>
+                                        <p:strVal val="visible"/>
+                                      </p:to>
+                                    </p:set>
+                                  </p:childTnLst>
+                                </p:cTn>
+                              </p:par>
+                            </p:childTnLst>
+                          </p:cTn>
+                        </p:par>
+                      </p:childTnLst>
+                    </p:cTn>
+                  </p:par>
+                  <p:par>
+                    <p:cTn id="20" fill="hold">
+                      <p:stCondLst>
+                        <p:cond delay="indefinite"/>
+                      </p:stCondLst>
+                      <p:childTnLst>
+                        <p:par>
+                          <p:cTn id="21" fill="hold">
+                            <p:stCondLst>
+                              <p:cond delay="0"/>
+                            </p:stCondLst>
+                            <p:childTnLst>
+                              <p:par>
+                                <p:cTn id="22" presetID="1" presetClass="entr" presetSubtype="0" fill="hold" nodeType="clickEffect">
+                                  <p:stCondLst>
+                                    <p:cond delay="0"/>
+                                  </p:stCondLst>
+                                  <p:childTnLst>
+                                    <p:set>
+                                      <p:cBhvr>
+                                        <p:cTn id="23" dur="1" fill="hold">
+                                          <p:stCondLst>
+                                            <p:cond delay="0"/>
+                                          </p:stCondLst>
+                                        </p:cTn>
+                                        <p:tgtEl>
+                                          <p:spTgt spid="6"/>
+                                        </p:tgtEl>
+                                        <p:attrNameLst>
+                                          <p:attrName>style.visibility</p:attrName>
+                                        </p:attrNameLst>
+                                      </p:cBhvr>
+                                      <p:to>
+                                        <p:strVal val="visible"/>
+                                      </p:to>
+                                    </p:set>
+                                  </p:childTnLst>
+                                </p:cTn>
+                              </p:par>
+                            </p:childTnLst>
+                          </p:cTn>
+                        </p:par>
+                      </p:childTnLst>
+                    </p:cTn>
+                  </p:par>
+                  <p:par>
+                    <p:cTn id="24" fill="hold">
+                      <p:stCondLst>
+                        <p:cond delay="indefinite"/>
+                      </p:stCondLst>
+                      <p:childTnLst>
+                        <p:par>
+                          <p:cTn id="25" fill="hold">
+                            <p:stCondLst>
+                              <p:cond delay="0"/>
+                            </p:stCondLst>
+                            <p:childTnLst>
+                              <p:par>
+                                <p:cTn id="26" presetID="10" presetClass="entr" presetSubtype="0" fill="hold" grpId="0" nodeType="clickEffect">
+                                  <p:stCondLst>
+                                    <p:cond delay="0"/>
+                                  </p:stCondLst>
+                                  <p:childTnLst>
+                                    <p:set>
+                                      <p:cBhvr>
+                                        <p:cTn id="27" dur="1" fill="hold">
+                                          <p:stCondLst>
+                                            <p:cond delay="0"/>
+                                          </p:stCondLst>
+                                        </p:cTn>
+                                        <p:tgtEl>
+                                          <p:spTgt spid="7"/>
+                                        </p:tgtEl>
+                                        <p:attrNameLst>
+                                          <p:attrName>style.visibility</p:attrName>
+                                        </p:attrNameLst>
+                                      </p:cBhvr>
+                                      <p:to>
+                                        <p:strVal val="visible"/>
+                                      </p:to>
+                                    </p:set>
+                                    <p:animEffect transition="in" filter="fade">
+                                      <p:cBhvr>
+                                        <p:cTn id="28" dur="500"/>
+                                        <p:tgtEl>
+                                          <p:spTgt spid="7"/>
+                                        </p:tgtEl>
+                                      </p:cBhvr>
+                                    </p:animEffect>
+                                  </p:childTnLst>
+                                </p:cTn>
+                              </p:par>
+                            </p:childTnLst>
+                          </p:cTn>
+                        </p:par>
+                      </p:childTnLst>
+                    </p:cTn>
+                  </p:par>
+                </p:childTnLst>
+              </p:cTn>
+              <p:prevCondLst>
+                <p:cond evt="onPrev" delay="0">
+                  <p:tgtEl>
+                    <p:sldTgt/>
+                  </p:tgtEl>
+                </p:cond>
+              </p:prevCondLst>
+              <p:nextCondLst>
+                <p:cond evt="onNext" delay="0">
+                  <p:tgtEl>
+                    <p:sldTgt/>
+                  </p:tgtEl>
+                </p:cond>
+              </p:nextCondLst>
+            </p:seq>
+          </p:childTnLst>
+        </p:cTn>
+      </p:par>
+    </p:tnLst>
+    <p:bldLst>
+      <p:bldP spid="7" grpId="0" animBg="1"/>
+    </p:bldLst>
+  </p:timing>
+</p:sld>
+</file>
+
+<file path=ppt/slides/slide9.xml><?xml version="1.0" encoding="utf-8"?>
+<p:sld xmlns:a="http://schemas.openxmlformats.org/drawingml/2006/main" xmlns:r="http://schemas.openxmlformats.org/officeDocument/2006/relationships" xmlns:p="http://schemas.openxmlformats.org/presentationml/2006/main">
+  <p:cSld>
+    <p:spTree>
+      <p:nvGrpSpPr>
+        <p:cNvPr id="1" name=""/>
+        <p:cNvGrpSpPr/>
+        <p:nvPr/>
+      </p:nvGrpSpPr>
+      <p:grpSpPr>
+        <a:xfrm>
+          <a:off x="0" y="0"/>
+          <a:ext cx="0" cy="0"/>
+          <a:chOff x="0" y="0"/>
+          <a:chExt cx="0" cy="0"/>
+        </a:xfrm>
+      </p:grpSpPr>
+      <p:sp>
+        <p:nvSpPr>
+          <p:cNvPr id="2" name="Title 1">
+            <a:extLst>
+              <a:ext uri="{FF2B5EF4-FFF2-40B4-BE49-F238E27FC236}">
+                <a16:creationId xmlns:a16="http://schemas.microsoft.com/office/drawing/2014/main" id="{1B15CE71-3BC7-0CE7-7B9F-76687EB62AFA}"/>
+              </a:ext>
+            </a:extLst>
+          </p:cNvPr>
+          <p:cNvSpPr>
+            <a:spLocks noGrp="1"/>
+          </p:cNvSpPr>
+          <p:nvPr>
+            <p:ph type="title"/>
+          </p:nvPr>
+        </p:nvSpPr>
+        <p:spPr/>
+        <p:txBody>
+          <a:bodyPr/>
+          <a:lstStyle/>
+          <a:p>
+            <a:r>
+              <a:rPr lang="da-DK" noProof="0" dirty="0"/>
+              <a:t>Tests</a:t>
+            </a:r>
+          </a:p>
+        </p:txBody>
+      </p:sp>
+      <p:sp>
+        <p:nvSpPr>
+          <p:cNvPr id="3" name="Slide Number Placeholder 2">
+            <a:extLst>
+              <a:ext uri="{FF2B5EF4-FFF2-40B4-BE49-F238E27FC236}">
+                <a16:creationId xmlns:a16="http://schemas.microsoft.com/office/drawing/2014/main" id="{862ABB3C-F582-AAD3-1F52-9A94DC691981}"/>
+              </a:ext>
+            </a:extLst>
+          </p:cNvPr>
+          <p:cNvSpPr>
+            <a:spLocks noGrp="1"/>
+          </p:cNvSpPr>
+          <p:nvPr>
+            <p:ph type="sldNum" sz="quarter" idx="12"/>
+          </p:nvPr>
+        </p:nvSpPr>
+        <p:spPr/>
+        <p:txBody>
+          <a:bodyPr/>
+          <a:lstStyle/>
+          <a:p>
+            <a:fld id="{C263D6C4-4840-40CC-AC84-17E24B3B7BDE}" type="slidenum">
+              <a:rPr lang="da-DK" noProof="0" smtClean="0"/>
+              <a:pPr/>
+              <a:t>9</a:t>
+            </a:fld>
+            <a:endParaRPr lang="da-DK" noProof="0" dirty="0"/>
+          </a:p>
+        </p:txBody>
+      </p:sp>
+      <p:sp>
+        <p:nvSpPr>
+          <p:cNvPr id="4" name="Text Placeholder 3">
+            <a:extLst>
+              <a:ext uri="{FF2B5EF4-FFF2-40B4-BE49-F238E27FC236}">
+                <a16:creationId xmlns:a16="http://schemas.microsoft.com/office/drawing/2014/main" id="{C4C08834-18EF-6C57-EA1C-84BBC76AEA5E}"/>
+              </a:ext>
+            </a:extLst>
+          </p:cNvPr>
+          <p:cNvSpPr>
+            <a:spLocks noGrp="1"/>
+          </p:cNvSpPr>
+          <p:nvPr>
+            <p:ph type="body" sz="quarter" idx="13"/>
+          </p:nvPr>
+        </p:nvSpPr>
+        <p:spPr/>
+        <p:txBody>
+          <a:bodyPr/>
+          <a:lstStyle/>
+          <a:p>
+            <a:endParaRPr lang="da-DK" noProof="0" dirty="0"/>
+          </a:p>
+        </p:txBody>
+      </p:sp>
+      <p:graphicFrame>
+        <p:nvGraphicFramePr>
+          <p:cNvPr id="5" name="Table 4">
+            <a:extLst>
+              <a:ext uri="{FF2B5EF4-FFF2-40B4-BE49-F238E27FC236}">
+                <a16:creationId xmlns:a16="http://schemas.microsoft.com/office/drawing/2014/main" id="{6FC2A5FF-121A-9261-46FB-DDCF3C4FD913}"/>
+              </a:ext>
+            </a:extLst>
+          </p:cNvPr>
+          <p:cNvGraphicFramePr>
+            <a:graphicFrameLocks noGrp="1"/>
+          </p:cNvGraphicFramePr>
+          <p:nvPr>
+            <p:extLst>
+              <p:ext uri="{D42A27DB-BD31-4B8C-83A1-F6EECF244321}">
+                <p14:modId xmlns:p14="http://schemas.microsoft.com/office/powerpoint/2010/main" val="2901634781"/>
+              </p:ext>
+            </p:extLst>
+          </p:nvPr>
+        </p:nvGraphicFramePr>
+        <p:xfrm>
+          <a:off x="603250" y="2129366"/>
+          <a:ext cx="5978526" cy="1452034"/>
+        </p:xfrm>
+        <a:graphic>
+          <a:graphicData uri="http://schemas.openxmlformats.org/drawingml/2006/table">
+            <a:tbl>
+              <a:tblPr firstRow="1" bandRow="1">
+                <a:tableStyleId>{5C22544A-7EE6-4342-B048-85BDC9FD1C3A}</a:tableStyleId>
+              </a:tblPr>
+              <a:tblGrid>
+                <a:gridCol w="2989263">
+                  <a:extLst>
+                    <a:ext uri="{9D8B030D-6E8A-4147-A177-3AD203B41FA5}">
+                      <a16:colId xmlns:a16="http://schemas.microsoft.com/office/drawing/2014/main" val="3815412382"/>
+                    </a:ext>
+                  </a:extLst>
+                </a:gridCol>
+                <a:gridCol w="2989263">
+                  <a:extLst>
+                    <a:ext uri="{9D8B030D-6E8A-4147-A177-3AD203B41FA5}">
+                      <a16:colId xmlns:a16="http://schemas.microsoft.com/office/drawing/2014/main" val="2273308379"/>
+                    </a:ext>
+                  </a:extLst>
+                </a:gridCol>
+              </a:tblGrid>
+              <a:tr h="726017">
+                <a:tc>
+                  <a:txBody>
+                    <a:bodyPr/>
+                    <a:lstStyle/>
+                    <a:p>
+                      <a:pPr algn="ctr"/>
+                      <a:r>
+                        <a:rPr lang="da-DK" noProof="0" dirty="0"/>
+                        <a:t>Unit Test</a:t>
+                      </a:r>
+                    </a:p>
+                  </a:txBody>
+                  <a:tcPr anchor="ctr"/>
+                </a:tc>
+                <a:tc>
+                  <a:txBody>
+                    <a:bodyPr/>
+                    <a:lstStyle/>
+                    <a:p>
+                      <a:pPr algn="ctr"/>
+                      <a:r>
+                        <a:rPr lang="da-DK" noProof="0" dirty="0"/>
+                        <a:t>Integrations Test</a:t>
+                      </a:r>
+                    </a:p>
+                  </a:txBody>
+                  <a:tcPr anchor="ctr"/>
+                </a:tc>
+                <a:extLst>
+                  <a:ext uri="{0D108BD9-81ED-4DB2-BD59-A6C34878D82A}">
+                    <a16:rowId xmlns:a16="http://schemas.microsoft.com/office/drawing/2014/main" val="1107477618"/>
+                  </a:ext>
+                </a:extLst>
+              </a:tr>
+              <a:tr h="726017">
+                <a:tc>
+                  <a:txBody>
+                    <a:bodyPr/>
+                    <a:lstStyle/>
+                    <a:p>
+                      <a:pPr algn="ctr"/>
+                      <a:r>
+                        <a:rPr lang="da-DK" noProof="0" dirty="0"/>
+                        <a:t> Test enkelte elementer</a:t>
+                      </a:r>
+                    </a:p>
+                  </a:txBody>
+                  <a:tcPr anchor="ctr"/>
+                </a:tc>
+                <a:tc>
+                  <a:txBody>
+                    <a:bodyPr/>
+                    <a:lstStyle/>
+                    <a:p>
+                      <a:pPr algn="ctr"/>
+                      <a:r>
+                        <a:rPr lang="da-DK" noProof="0" dirty="0"/>
+                        <a:t>Test integrationen mellem elementerne</a:t>
+                      </a:r>
+                    </a:p>
+                  </a:txBody>
+                  <a:tcPr anchor="ctr"/>
+                </a:tc>
+                <a:extLst>
+                  <a:ext uri="{0D108BD9-81ED-4DB2-BD59-A6C34878D82A}">
+                    <a16:rowId xmlns:a16="http://schemas.microsoft.com/office/drawing/2014/main" val="3327044027"/>
+                  </a:ext>
+                </a:extLst>
+              </a:tr>
+            </a:tbl>
+          </a:graphicData>
+        </a:graphic>
+      </p:graphicFrame>
+    </p:spTree>
+    <p:extLst>
+      <p:ext uri="{BB962C8B-B14F-4D97-AF65-F5344CB8AC3E}">
+        <p14:creationId xmlns:p14="http://schemas.microsoft.com/office/powerpoint/2010/main" val="3250973963"/>
+      </p:ext>
+    </p:extLst>
+  </p:cSld>
+  <p:clrMapOvr>
+    <a:masterClrMapping/>
+  </p:clrMapOvr>
+  <p:timing>
+    <p:tnLst>
+      <p:par>
+        <p:cTn id="1" dur="indefinite" restart="never" nodeType="tmRoot">
+          <p:childTnLst>
+            <p:seq concurrent="1" nextAc="seek">
+              <p:cTn id="2" dur="indefinite" nodeType="mainSeq">
+                <p:childTnLst>
+                  <p:par>
+                    <p:cTn id="3" fill="hold">
+                      <p:stCondLst>
+                        <p:cond delay="indefinite"/>
+                      </p:stCondLst>
+                      <p:childTnLst>
+                        <p:par>
+                          <p:cTn id="4" fill="hold">
+                            <p:stCondLst>
+                              <p:cond delay="0"/>
+                            </p:stCondLst>
+                            <p:childTnLst>
+                              <p:par>
+                                <p:cTn id="5" presetID="10" presetClass="entr" presetSubtype="0" fill="hold" nodeType="clickEffect">
+                                  <p:stCondLst>
+                                    <p:cond delay="0"/>
+                                  </p:stCondLst>
+                                  <p:childTnLst>
+                                    <p:set>
+                                      <p:cBhvr>
+                                        <p:cTn id="6" dur="1" fill="hold">
+                                          <p:stCondLst>
+                                            <p:cond delay="0"/>
+                                          </p:stCondLst>
+                                        </p:cTn>
+                                        <p:tgtEl>
+                                          <p:spTgt spid="5"/>
+                                        </p:tgtEl>
+                                        <p:attrNameLst>
+                                          <p:attrName>style.visibility</p:attrName>
+                                        </p:attrNameLst>
+                                      </p:cBhvr>
+                                      <p:to>
+                                        <p:strVal val="visible"/>
+                                      </p:to>
+                                    </p:set>
+                                    <p:animEffect transition="in" filter="fade">
+                                      <p:cBhvr>
+                                        <p:cTn id="7" dur="500"/>
+                                        <p:tgtEl>
+                                          <p:spTgt spid="5"/>
+                                        </p:tgtEl>
+                                      </p:cBhvr>
+                                    </p:animEffect>
+                                  </p:childTnLst>
+                                </p:cTn>
+                              </p:par>
+                            </p:childTnLst>
+                          </p:cTn>
+                        </p:par>
+                      </p:childTnLst>
+                    </p:cTn>
+                  </p:par>
+                </p:childTnLst>
+              </p:cTn>
+              <p:prevCondLst>
+                <p:cond evt="onPrev" delay="0">
+                  <p:tgtEl>
+                    <p:sldTgt/>
+                  </p:tgtEl>
+                </p:cond>
+              </p:prevCondLst>
+              <p:nextCondLst>
+                <p:cond evt="onNext" delay="0">
+                  <p:tgtEl>
+                    <p:sldTgt/>
+                  </p:tgtEl>
+                </p:cond>
+              </p:nextCondLst>
+            </p:seq>
+          </p:childTnLst>
+        </p:cTn>
+      </p:par>
+    </p:tnLst>
+  </p:timing>
 </p:sld>
 </file>
 
@@ -27163,15 +29223,6 @@
 </file>
 
 <file path=customXml/item2.xml><?xml version="1.0" encoding="utf-8"?>
-<?mso-contentType ?>
-<FormTemplates xmlns="http://schemas.microsoft.com/sharepoint/v3/contenttype/forms">
-  <Display>DocumentLibraryForm</Display>
-  <Edit>DocumentLibraryForm</Edit>
-  <New>DocumentLibraryForm</New>
-</FormTemplates>
-</file>
-
-<file path=customXml/item3.xml><?xml version="1.0" encoding="utf-8"?>
 <ct:contentTypeSchema xmlns:ct="http://schemas.microsoft.com/office/2006/metadata/contentType" xmlns:ma="http://schemas.microsoft.com/office/2006/metadata/properties/metaAttributes" ct:_="" ma:_="" ma:contentTypeName="Document" ma:contentTypeID="0x01010079F111ED35F8CC479449609E8A0923A6" ma:contentTypeVersion="11" ma:contentTypeDescription="Create a new document." ma:contentTypeScope="" ma:versionID="96291512c1ee715ab617f4c07df79fc1">
   <xsd:schema xmlns:xsd="http://www.w3.org/2001/XMLSchema" xmlns:xs="http://www.w3.org/2001/XMLSchema" xmlns:p="http://schemas.microsoft.com/office/2006/metadata/properties" xmlns:ns2="71af3243-3dd4-4a8d-8c0d-dd76da1f02a5" xmlns:ns3="16c05727-aa75-4e4a-9b5f-8a80a1165891" targetNamespace="http://schemas.microsoft.com/office/2006/metadata/properties" ma:root="true" ma:fieldsID="8256c27c40ca5c40ce1cf6c44f0205df" ns2:_="" ns3:_="">
     <xsd:import namespace="71af3243-3dd4-4a8d-8c0d-dd76da1f02a5"/>
@@ -27382,6 +29433,15 @@
 </ct:contentTypeSchema>
 </file>
 
+<file path=customXml/item3.xml><?xml version="1.0" encoding="utf-8"?>
+<?mso-contentType ?>
+<FormTemplates xmlns="http://schemas.microsoft.com/sharepoint/v3/contenttype/forms">
+  <Display>DocumentLibraryForm</Display>
+  <Edit>DocumentLibraryForm</Edit>
+  <New>DocumentLibraryForm</New>
+</FormTemplates>
+</file>
+
 <file path=customXml/itemProps1.xml><?xml version="1.0" encoding="utf-8"?>
 <ds:datastoreItem xmlns:ds="http://schemas.openxmlformats.org/officeDocument/2006/customXml" ds:itemID="{F5757914-1161-4661-9696-421FD6935CDD}">
   <ds:schemaRefs>
@@ -27393,14 +29453,6 @@
 </file>
 
 <file path=customXml/itemProps2.xml><?xml version="1.0" encoding="utf-8"?>
-<ds:datastoreItem xmlns:ds="http://schemas.openxmlformats.org/officeDocument/2006/customXml" ds:itemID="{5B26E0C9-B2AA-42E6-97B6-E1B7D9EAF129}">
-  <ds:schemaRefs>
-    <ds:schemaRef ds:uri="http://schemas.microsoft.com/sharepoint/v3/contenttype/forms"/>
-  </ds:schemaRefs>
-</ds:datastoreItem>
-</file>
-
-<file path=customXml/itemProps3.xml><?xml version="1.0" encoding="utf-8"?>
 <ds:datastoreItem xmlns:ds="http://schemas.openxmlformats.org/officeDocument/2006/customXml" ds:itemID="{4C103400-4A22-4E35-B588-4C4D42638959}">
   <ds:schemaRefs>
     <ds:schemaRef ds:uri="http://schemas.microsoft.com/office/2006/metadata/contentType"/>
@@ -27417,4 +29469,12 @@
     <ds:schemaRef ds:uri="http://schemas.microsoft.com/internal/obd"/>
   </ds:schemaRefs>
 </ds:datastoreItem>
+</file>
+
+<file path=customXml/itemProps3.xml><?xml version="1.0" encoding="utf-8"?>
+<ds:datastoreItem xmlns:ds="http://schemas.openxmlformats.org/officeDocument/2006/customXml" ds:itemID="{5B26E0C9-B2AA-42E6-97B6-E1B7D9EAF129}">
+  <ds:schemaRefs>
+    <ds:schemaRef ds:uri="http://schemas.microsoft.com/sharepoint/v3/contenttype/forms"/>
+  </ds:schemaRefs>
+</ds:datastoreItem>
 </file>